--- a/Reporte 220626.pptx
+++ b/Reporte 220626.pptx
@@ -5,7 +5,7 @@
     <p:sldMasterId id="2147483672" r:id="rId1"/>
   </p:sldMasterIdLst>
   <p:notesMasterIdLst>
-    <p:notesMasterId r:id="rId19"/>
+    <p:notesMasterId r:id="rId18"/>
   </p:notesMasterIdLst>
   <p:sldIdLst>
     <p:sldId id="350" r:id="rId2"/>
@@ -22,25 +22,24 @@
     <p:sldId id="369" r:id="rId13"/>
     <p:sldId id="361" r:id="rId14"/>
     <p:sldId id="371" r:id="rId15"/>
-    <p:sldId id="401" r:id="rId16"/>
-    <p:sldId id="400" r:id="rId17"/>
-    <p:sldId id="280" r:id="rId18"/>
+    <p:sldId id="400" r:id="rId16"/>
+    <p:sldId id="280" r:id="rId17"/>
   </p:sldIdLst>
   <p:sldSz cx="9144000" cy="5143500" type="screen16x9"/>
   <p:notesSz cx="6858000" cy="9144000"/>
   <p:embeddedFontLst>
     <p:embeddedFont>
       <p:font typeface="Montserrat" panose="00000500000000000000" pitchFamily="2" charset="0"/>
-      <p:regular r:id="rId20"/>
-      <p:bold r:id="rId21"/>
-      <p:italic r:id="rId22"/>
-      <p:boldItalic r:id="rId23"/>
+      <p:regular r:id="rId19"/>
+      <p:bold r:id="rId20"/>
+      <p:italic r:id="rId21"/>
+      <p:boldItalic r:id="rId22"/>
     </p:embeddedFont>
     <p:embeddedFont>
       <p:font typeface="Montserrat Black" panose="00000A00000000000000" pitchFamily="2" charset="0"/>
-      <p:bold r:id="rId24"/>
-      <p:italic r:id="rId25"/>
-      <p:boldItalic r:id="rId26"/>
+      <p:bold r:id="rId23"/>
+      <p:italic r:id="rId24"/>
+      <p:boldItalic r:id="rId25"/>
     </p:embeddedFont>
   </p:embeddedFontLst>
   <p:defaultTextStyle>
@@ -6511,10 +6510,10 @@
       </p:sp>
       <p:pic>
         <p:nvPicPr>
-          <p:cNvPr id="4" name="Imagen 3">
+          <p:cNvPr id="5" name="Imagen 4">
             <a:extLst>
               <a:ext uri="{FF2B5EF4-FFF2-40B4-BE49-F238E27FC236}">
-                <a16:creationId xmlns:a16="http://schemas.microsoft.com/office/drawing/2014/main" id="{26E7E212-B9A3-A3E2-696D-E554248824A1}"/>
+                <a16:creationId xmlns:a16="http://schemas.microsoft.com/office/drawing/2014/main" id="{36EF7AD8-DC16-3E77-1CA3-00135DFD7FDF}"/>
               </a:ext>
             </a:extLst>
           </p:cNvPr>
@@ -6531,8 +6530,8 @@
         </p:blipFill>
         <p:spPr>
           <a:xfrm>
-            <a:off x="-6725" y="673633"/>
-            <a:ext cx="9144000" cy="3939109"/>
+            <a:off x="0" y="667539"/>
+            <a:ext cx="9144000" cy="3951298"/>
           </a:xfrm>
           <a:prstGeom prst="rect">
             <a:avLst/>
@@ -6609,10 +6608,10 @@
       </p:sp>
       <p:pic>
         <p:nvPicPr>
-          <p:cNvPr id="3" name="Imagen 2">
+          <p:cNvPr id="4" name="Imagen 3">
             <a:extLst>
               <a:ext uri="{FF2B5EF4-FFF2-40B4-BE49-F238E27FC236}">
-                <a16:creationId xmlns:a16="http://schemas.microsoft.com/office/drawing/2014/main" id="{36C795D8-48B2-C900-4066-9E4A0CDA5853}"/>
+                <a16:creationId xmlns:a16="http://schemas.microsoft.com/office/drawing/2014/main" id="{82F72DA8-40D4-4DAE-37C3-9534D2C83CFA}"/>
               </a:ext>
             </a:extLst>
           </p:cNvPr>
@@ -6629,8 +6628,8 @@
         </p:blipFill>
         <p:spPr>
           <a:xfrm>
-            <a:off x="0" y="1198191"/>
-            <a:ext cx="9144000" cy="2889993"/>
+            <a:off x="-6725" y="1162368"/>
+            <a:ext cx="9144000" cy="2961640"/>
           </a:xfrm>
           <a:prstGeom prst="rect">
             <a:avLst/>
@@ -6713,10 +6712,10 @@
       </p:sp>
       <p:pic>
         <p:nvPicPr>
-          <p:cNvPr id="3" name="Imagen 2">
+          <p:cNvPr id="4" name="Imagen 3">
             <a:extLst>
               <a:ext uri="{FF2B5EF4-FFF2-40B4-BE49-F238E27FC236}">
-                <a16:creationId xmlns:a16="http://schemas.microsoft.com/office/drawing/2014/main" id="{2EE9499C-5200-B517-76DB-C1B561693066}"/>
+                <a16:creationId xmlns:a16="http://schemas.microsoft.com/office/drawing/2014/main" id="{174EE023-EF9D-57AA-4F84-E2D0E8D1B292}"/>
               </a:ext>
             </a:extLst>
           </p:cNvPr>
@@ -6733,8 +6732,8 @@
         </p:blipFill>
         <p:spPr>
           <a:xfrm>
-            <a:off x="0" y="983646"/>
-            <a:ext cx="9144000" cy="3319084"/>
+            <a:off x="0" y="482977"/>
+            <a:ext cx="9144000" cy="4320422"/>
           </a:xfrm>
           <a:prstGeom prst="rect">
             <a:avLst/>
@@ -6811,10 +6810,10 @@
       </p:sp>
       <p:pic>
         <p:nvPicPr>
-          <p:cNvPr id="5" name="Imagen 4">
+          <p:cNvPr id="4" name="Imagen 3">
             <a:extLst>
               <a:ext uri="{FF2B5EF4-FFF2-40B4-BE49-F238E27FC236}">
-                <a16:creationId xmlns:a16="http://schemas.microsoft.com/office/drawing/2014/main" id="{66219BF6-CFF2-6677-3456-8C60A816C787}"/>
+                <a16:creationId xmlns:a16="http://schemas.microsoft.com/office/drawing/2014/main" id="{11959E18-E124-11EF-419B-87C06A3326E9}"/>
               </a:ext>
             </a:extLst>
           </p:cNvPr>
@@ -6831,8 +6830,8 @@
         </p:blipFill>
         <p:spPr>
           <a:xfrm>
-            <a:off x="0" y="1076594"/>
-            <a:ext cx="9144000" cy="3133187"/>
+            <a:off x="-6725" y="1093745"/>
+            <a:ext cx="9144000" cy="3098885"/>
           </a:xfrm>
           <a:prstGeom prst="rect">
             <a:avLst/>
@@ -6909,10 +6908,10 @@
       </p:sp>
       <p:pic>
         <p:nvPicPr>
-          <p:cNvPr id="4" name="Imagen 3">
+          <p:cNvPr id="3" name="Imagen 2">
             <a:extLst>
               <a:ext uri="{FF2B5EF4-FFF2-40B4-BE49-F238E27FC236}">
-                <a16:creationId xmlns:a16="http://schemas.microsoft.com/office/drawing/2014/main" id="{8DF6B71F-EAF5-E51C-C9CA-39B6CE2304C2}"/>
+                <a16:creationId xmlns:a16="http://schemas.microsoft.com/office/drawing/2014/main" id="{C7877CF1-820F-5D54-5863-C9190864EC72}"/>
               </a:ext>
             </a:extLst>
           </p:cNvPr>
@@ -6929,8 +6928,8 @@
         </p:blipFill>
         <p:spPr>
           <a:xfrm>
-            <a:off x="0" y="533204"/>
-            <a:ext cx="9144000" cy="4321891"/>
+            <a:off x="0" y="451547"/>
+            <a:ext cx="9144000" cy="4383282"/>
           </a:xfrm>
           <a:prstGeom prst="rect">
             <a:avLst/>
@@ -6951,110 +6950,6 @@
 </file>
 
 <file path=ppt/slides/slide15.xml><?xml version="1.0" encoding="utf-8"?>
-<p:sld xmlns:a="http://schemas.openxmlformats.org/drawingml/2006/main" xmlns:r="http://schemas.openxmlformats.org/officeDocument/2006/relationships" xmlns:p="http://schemas.openxmlformats.org/presentationml/2006/main">
-  <p:cSld>
-    <p:spTree>
-      <p:nvGrpSpPr>
-        <p:cNvPr id="1" name="">
-          <a:extLst>
-            <a:ext uri="{FF2B5EF4-FFF2-40B4-BE49-F238E27FC236}">
-              <a16:creationId xmlns:a16="http://schemas.microsoft.com/office/drawing/2014/main" id="{EE9581CC-3E44-E007-5391-2FF11DE953EE}"/>
-            </a:ext>
-          </a:extLst>
-        </p:cNvPr>
-        <p:cNvGrpSpPr/>
-        <p:nvPr/>
-      </p:nvGrpSpPr>
-      <p:grpSpPr>
-        <a:xfrm>
-          <a:off x="0" y="0"/>
-          <a:ext cx="0" cy="0"/>
-          <a:chOff x="0" y="0"/>
-          <a:chExt cx="0" cy="0"/>
-        </a:xfrm>
-      </p:grpSpPr>
-      <p:sp>
-        <p:nvSpPr>
-          <p:cNvPr id="6" name="CuadroTexto 5">
-            <a:extLst>
-              <a:ext uri="{FF2B5EF4-FFF2-40B4-BE49-F238E27FC236}">
-                <a16:creationId xmlns:a16="http://schemas.microsoft.com/office/drawing/2014/main" id="{A07908B9-0429-B1EE-CD49-5627DDA54DD4}"/>
-              </a:ext>
-            </a:extLst>
-          </p:cNvPr>
-          <p:cNvSpPr txBox="1"/>
-          <p:nvPr/>
-        </p:nvSpPr>
-        <p:spPr>
-          <a:xfrm>
-            <a:off x="1926166" y="88135"/>
-            <a:ext cx="5291667" cy="307777"/>
-          </a:xfrm>
-          <a:prstGeom prst="rect">
-            <a:avLst/>
-          </a:prstGeom>
-          <a:noFill/>
-        </p:spPr>
-        <p:txBody>
-          <a:bodyPr wrap="square" rtlCol="0">
-            <a:spAutoFit/>
-          </a:bodyPr>
-          <a:lstStyle/>
-          <a:p>
-            <a:pPr algn="ctr"/>
-            <a:r>
-              <a:rPr lang="es-MX" b="1" dirty="0">
-                <a:latin typeface="Montserrat" pitchFamily="2" charset="0"/>
-              </a:rPr>
-              <a:t>Temas de gobierno por radiodifusora</a:t>
-            </a:r>
-          </a:p>
-        </p:txBody>
-      </p:sp>
-      <p:pic>
-        <p:nvPicPr>
-          <p:cNvPr id="3" name="Imagen 2">
-            <a:extLst>
-              <a:ext uri="{FF2B5EF4-FFF2-40B4-BE49-F238E27FC236}">
-                <a16:creationId xmlns:a16="http://schemas.microsoft.com/office/drawing/2014/main" id="{D828D105-D408-4135-3EBE-306100300E80}"/>
-              </a:ext>
-            </a:extLst>
-          </p:cNvPr>
-          <p:cNvPicPr>
-            <a:picLocks noChangeAspect="1"/>
-          </p:cNvPicPr>
-          <p:nvPr/>
-        </p:nvPicPr>
-        <p:blipFill>
-          <a:blip r:embed="rId2"/>
-          <a:stretch>
-            <a:fillRect/>
-          </a:stretch>
-        </p:blipFill>
-        <p:spPr>
-          <a:xfrm>
-            <a:off x="0" y="775590"/>
-            <a:ext cx="9144000" cy="3735195"/>
-          </a:xfrm>
-          <a:prstGeom prst="rect">
-            <a:avLst/>
-          </a:prstGeom>
-        </p:spPr>
-      </p:pic>
-    </p:spTree>
-    <p:extLst>
-      <p:ext uri="{BB962C8B-B14F-4D97-AF65-F5344CB8AC3E}">
-        <p14:creationId xmlns:p14="http://schemas.microsoft.com/office/powerpoint/2010/main" val="167522460"/>
-      </p:ext>
-    </p:extLst>
-  </p:cSld>
-  <p:clrMapOvr>
-    <a:masterClrMapping/>
-  </p:clrMapOvr>
-</p:sld>
-</file>
-
-<file path=ppt/slides/slide16.xml><?xml version="1.0" encoding="utf-8"?>
 <p:sld xmlns:a="http://schemas.openxmlformats.org/drawingml/2006/main" xmlns:r="http://schemas.openxmlformats.org/officeDocument/2006/relationships" xmlns:p="http://schemas.openxmlformats.org/presentationml/2006/main">
   <p:cSld>
     <p:spTree>
@@ -7111,10 +7006,10 @@
       </p:sp>
       <p:pic>
         <p:nvPicPr>
-          <p:cNvPr id="3" name="Imagen 2">
+          <p:cNvPr id="4" name="Imagen 3">
             <a:extLst>
               <a:ext uri="{FF2B5EF4-FFF2-40B4-BE49-F238E27FC236}">
-                <a16:creationId xmlns:a16="http://schemas.microsoft.com/office/drawing/2014/main" id="{82E2C46C-5B03-FF77-2B40-B76E7D68A394}"/>
+                <a16:creationId xmlns:a16="http://schemas.microsoft.com/office/drawing/2014/main" id="{3B71AB38-F620-46FD-7ADA-1924918FDD36}"/>
               </a:ext>
             </a:extLst>
           </p:cNvPr>
@@ -7131,8 +7026,8 @@
         </p:blipFill>
         <p:spPr>
           <a:xfrm>
-            <a:off x="1623601" y="433089"/>
-            <a:ext cx="5896798" cy="4277322"/>
+            <a:off x="-1" y="901651"/>
+            <a:ext cx="9144000" cy="3483073"/>
           </a:xfrm>
           <a:prstGeom prst="rect">
             <a:avLst/>
@@ -7152,7 +7047,7 @@
 </p:sld>
 </file>
 
-<file path=ppt/slides/slide17.xml><?xml version="1.0" encoding="utf-8"?>
+<file path=ppt/slides/slide16.xml><?xml version="1.0" encoding="utf-8"?>
 <p:sld xmlns:a="http://schemas.openxmlformats.org/drawingml/2006/main" xmlns:r="http://schemas.openxmlformats.org/officeDocument/2006/relationships" xmlns:p="http://schemas.openxmlformats.org/presentationml/2006/main">
   <p:cSld>
     <p:spTree>
